--- a/ppt/out/WLC2급_제07강_생전정리·유품정리와디지털유산.pptx
+++ b/ppt/out/WLC2급_제07강_생전정리·유품정리와디지털유산.pptx
@@ -158,7 +158,7 @@
   <p:extLst>
     <p:ext uri="{521415D9-36F7-43E2-AB2F-B90AF26B5E84}">
       <p14:sectionLst xmlns:p14="http://schemas.microsoft.com/office/powerpoint/2010/main">
-        <p14:section name="열기" id="{645495a6-fc4e-139a-4b7f-89be64654b65}">
+        <p14:section name="열기" id="{f4d1c05c-2e2a-3289-0e55-32c3c67e728e}">
           <p14:sldIdLst>
             <p14:sldId id="256"/>
             <p14:sldId id="257"/>
@@ -171,7 +171,7 @@
             <p14:sldId id="264"/>
           </p14:sldIdLst>
         </p14:section>
-        <p14:section name="1교시 살아 있을 때의 정리" id="{52018778-4c40-b987-6a69-4be156f0dfb4}">
+        <p14:section name="1교시 살아 있을 때의 정리" id="{01837d86-ec60-8ab9-410b-7534cfb73b8e}">
           <p14:sldIdLst>
             <p14:sldId id="265"/>
             <p14:sldId id="266"/>
@@ -185,7 +185,7 @@
             <p14:sldId id="274"/>
           </p14:sldIdLst>
         </p14:section>
-        <p14:section name="2교시 유품정리와 디지털 유산" id="{b1a78cf6-865b-f4dd-a84c-6f494d45e5d0}">
+        <p14:section name="2교시 유품정리와 디지털 유산" id="{f49f855b-f193-b5d6-ddfb-02abd00ebe5f}">
           <p14:sldIdLst>
             <p14:sldId id="275"/>
             <p14:sldId id="276"/>
@@ -202,7 +202,7 @@
             <p14:sldId id="287"/>
           </p14:sldIdLst>
         </p14:section>
-        <p14:section name="3교시 무엇을 남길 것인가" id="{fa187753-ec64-cea2-23aa-3712d25d894f}">
+        <p14:section name="3교시 무엇을 남길 것인가" id="{4e483c5b-02fe-fc53-06de-fb022d2801a0}">
           <p14:sldIdLst>
             <p14:sldId id="288"/>
             <p14:sldId id="289"/>
@@ -220,7 +220,7 @@
             <p14:sldId id="301"/>
           </p14:sldIdLst>
         </p14:section>
-        <p14:section name="정리와 예고" id="{c365dfe9-f0e3-d92b-5f63-e1eeb4f6bba6}">
+        <p14:section name="정리와 예고" id="{cf1f48e1-122c-d52c-ec45-c82ff46e245c}">
           <p14:sldIdLst>
             <p14:sldId id="302"/>
             <p14:sldId id="303"/>
@@ -6385,7 +6385,7 @@
         <p:spPr>
           <a:xfrm>
             <a:off x="548640" y="2560320"/>
-            <a:ext cx="9144000" cy="1097280"/>
+            <a:ext cx="10607040" cy="1097280"/>
           </a:xfrm>
           <a:prstGeom prst="rect">
             <a:avLst/>
@@ -56106,47 +56106,47 @@
 </file>
 
 <file path=ppt/theme/theme1.xml><?xml version="1.0" encoding="utf-8"?>
-<a:theme xmlns:a="http://schemas.openxmlformats.org/drawingml/2006/main" name="WLC Teal">
+<a:theme xmlns:a="http://schemas.openxmlformats.org/drawingml/2006/main" name="Office Theme">
   <a:themeElements>
-    <a:clrScheme name="WLC Teal">
+    <a:clrScheme name="Office">
       <a:dk1>
-        <a:srgbClr val="222222"/>
+        <a:sysClr val="windowText" lastClr="000000"/>
       </a:dk1>
       <a:lt1>
-        <a:srgbClr val="FFFFFF"/>
+        <a:sysClr val="window" lastClr="FFFFFF"/>
       </a:lt1>
       <a:dk2>
-        <a:srgbClr val="1F4E4A"/>
+        <a:srgbClr val="44546A"/>
       </a:dk2>
       <a:lt2>
-        <a:srgbClr val="EAF3F0"/>
+        <a:srgbClr val="E7E6E6"/>
       </a:lt2>
       <a:accent1>
-        <a:srgbClr val="2E7D6B"/>
+        <a:srgbClr val="4472C4"/>
       </a:accent1>
       <a:accent2>
-        <a:srgbClr val="D98E04"/>
+        <a:srgbClr val="ED7D31"/>
       </a:accent2>
       <a:accent3>
-        <a:srgbClr val="3A6EA5"/>
+        <a:srgbClr val="A5A5A5"/>
       </a:accent3>
       <a:accent4>
-        <a:srgbClr val="B5452F"/>
+        <a:srgbClr val="FFC000"/>
       </a:accent4>
       <a:accent5>
-        <a:srgbClr val="8FB9A8"/>
+        <a:srgbClr val="5B9BD5"/>
       </a:accent5>
       <a:accent6>
-        <a:srgbClr val="6B6B6B"/>
+        <a:srgbClr val="70AD47"/>
       </a:accent6>
       <a:hlink>
-        <a:srgbClr val="3A6EA5"/>
+        <a:srgbClr val="0563C1"/>
       </a:hlink>
       <a:folHlink>
-        <a:srgbClr val="1F4E4A"/>
+        <a:srgbClr val="954F72"/>
       </a:folHlink>
     </a:clrScheme>
-    <a:fontScheme name="WLC Teal">
+    <a:fontScheme name="Office">
       <a:majorFont>
         <a:latin typeface="Noto Serif KR Black"/>
         <a:ea typeface=""/>

--- a/ppt/out/WLC2급_제07강_생전정리·유품정리와디지털유산.pptx
+++ b/ppt/out/WLC2급_제07강_생전정리·유품정리와디지털유산.pptx
@@ -158,7 +158,7 @@
   <p:extLst>
     <p:ext uri="{521415D9-36F7-43E2-AB2F-B90AF26B5E84}">
       <p14:sectionLst xmlns:p14="http://schemas.microsoft.com/office/powerpoint/2010/main">
-        <p14:section name="열기" id="{f4d1c05c-2e2a-3289-0e55-32c3c67e728e}">
+        <p14:section name="열기" id="{ed3b7fec-5780-2e8d-7cc4-f6bda938fcec}">
           <p14:sldIdLst>
             <p14:sldId id="256"/>
             <p14:sldId id="257"/>
@@ -171,7 +171,7 @@
             <p14:sldId id="264"/>
           </p14:sldIdLst>
         </p14:section>
-        <p14:section name="1교시 살아 있을 때의 정리" id="{01837d86-ec60-8ab9-410b-7534cfb73b8e}">
+        <p14:section name="1교시 살아 있을 때의 정리" id="{e416fe89-f0c1-b3d9-9381-f1ace2dd0a58}">
           <p14:sldIdLst>
             <p14:sldId id="265"/>
             <p14:sldId id="266"/>
@@ -185,7 +185,7 @@
             <p14:sldId id="274"/>
           </p14:sldIdLst>
         </p14:section>
-        <p14:section name="2교시 유품정리와 디지털 유산" id="{f49f855b-f193-b5d6-ddfb-02abd00ebe5f}">
+        <p14:section name="2교시 유품정리와 디지털 유산" id="{bae7e507-a299-6296-d025-e531f27c0ad4}">
           <p14:sldIdLst>
             <p14:sldId id="275"/>
             <p14:sldId id="276"/>
@@ -202,7 +202,7 @@
             <p14:sldId id="287"/>
           </p14:sldIdLst>
         </p14:section>
-        <p14:section name="3교시 무엇을 남길 것인가" id="{4e483c5b-02fe-fc53-06de-fb022d2801a0}">
+        <p14:section name="3교시 무엇을 남길 것인가" id="{2db9868f-509d-2c63-f0c2-70211bcf4fdd}">
           <p14:sldIdLst>
             <p14:sldId id="288"/>
             <p14:sldId id="289"/>
@@ -220,7 +220,7 @@
             <p14:sldId id="301"/>
           </p14:sldIdLst>
         </p14:section>
-        <p14:section name="정리와 예고" id="{cf1f48e1-122c-d52c-ec45-c82ff46e245c}">
+        <p14:section name="정리와 예고" id="{2e625a67-2aaf-cd4f-6b14-967beab8e246}">
           <p14:sldIdLst>
             <p14:sldId id="302"/>
             <p14:sldId id="303"/>
@@ -56106,47 +56106,47 @@
 </file>
 
 <file path=ppt/theme/theme1.xml><?xml version="1.0" encoding="utf-8"?>
-<a:theme xmlns:a="http://schemas.openxmlformats.org/drawingml/2006/main" name="Office Theme">
+<a:theme xmlns:a="http://schemas.openxmlformats.org/drawingml/2006/main" name="WLC Teal">
   <a:themeElements>
-    <a:clrScheme name="Office">
+    <a:clrScheme name="WLC Teal">
       <a:dk1>
-        <a:sysClr val="windowText" lastClr="000000"/>
+        <a:srgbClr val="222222"/>
       </a:dk1>
       <a:lt1>
-        <a:sysClr val="window" lastClr="FFFFFF"/>
+        <a:srgbClr val="FFFFFF"/>
       </a:lt1>
       <a:dk2>
-        <a:srgbClr val="44546A"/>
+        <a:srgbClr val="1F4E4A"/>
       </a:dk2>
       <a:lt2>
-        <a:srgbClr val="E7E6E6"/>
+        <a:srgbClr val="EAF3F0"/>
       </a:lt2>
       <a:accent1>
-        <a:srgbClr val="4472C4"/>
+        <a:srgbClr val="2E7D6B"/>
       </a:accent1>
       <a:accent2>
-        <a:srgbClr val="ED7D31"/>
+        <a:srgbClr val="D98E04"/>
       </a:accent2>
       <a:accent3>
-        <a:srgbClr val="A5A5A5"/>
+        <a:srgbClr val="3A6EA5"/>
       </a:accent3>
       <a:accent4>
-        <a:srgbClr val="FFC000"/>
+        <a:srgbClr val="B5452F"/>
       </a:accent4>
       <a:accent5>
-        <a:srgbClr val="5B9BD5"/>
+        <a:srgbClr val="8FB9A8"/>
       </a:accent5>
       <a:accent6>
-        <a:srgbClr val="70AD47"/>
+        <a:srgbClr val="6B6B6B"/>
       </a:accent6>
       <a:hlink>
-        <a:srgbClr val="0563C1"/>
+        <a:srgbClr val="3A6EA5"/>
       </a:hlink>
       <a:folHlink>
-        <a:srgbClr val="954F72"/>
+        <a:srgbClr val="1F4E4A"/>
       </a:folHlink>
     </a:clrScheme>
-    <a:fontScheme name="Office">
+    <a:fontScheme name="WLC Teal">
       <a:majorFont>
         <a:latin typeface="Noto Serif KR Black"/>
         <a:ea typeface=""/>
